--- a/Reporte 160626.pptx
+++ b/Reporte 160626.pptx
@@ -5,7 +5,7 @@
     <p:sldMasterId id="2147483672" r:id="rId1"/>
   </p:sldMasterIdLst>
   <p:notesMasterIdLst>
-    <p:notesMasterId r:id="rId16"/>
+    <p:notesMasterId r:id="rId17"/>
   </p:notesMasterIdLst>
   <p:sldIdLst>
     <p:sldId id="350" r:id="rId2"/>
@@ -21,23 +21,24 @@
     <p:sldId id="369" r:id="rId12"/>
     <p:sldId id="361" r:id="rId13"/>
     <p:sldId id="371" r:id="rId14"/>
-    <p:sldId id="280" r:id="rId15"/>
+    <p:sldId id="400" r:id="rId15"/>
+    <p:sldId id="280" r:id="rId16"/>
   </p:sldIdLst>
   <p:sldSz cx="9144000" cy="5143500" type="screen16x9"/>
   <p:notesSz cx="6858000" cy="9144000"/>
   <p:embeddedFontLst>
     <p:embeddedFont>
       <p:font typeface="Montserrat" panose="00000500000000000000" pitchFamily="2" charset="0"/>
-      <p:regular r:id="rId17"/>
-      <p:bold r:id="rId18"/>
-      <p:italic r:id="rId19"/>
-      <p:boldItalic r:id="rId20"/>
+      <p:regular r:id="rId18"/>
+      <p:bold r:id="rId19"/>
+      <p:italic r:id="rId20"/>
+      <p:boldItalic r:id="rId21"/>
     </p:embeddedFont>
     <p:embeddedFont>
       <p:font typeface="Montserrat Black" panose="00000A00000000000000" pitchFamily="2" charset="0"/>
-      <p:bold r:id="rId21"/>
-      <p:italic r:id="rId22"/>
-      <p:boldItalic r:id="rId23"/>
+      <p:bold r:id="rId22"/>
+      <p:italic r:id="rId23"/>
+      <p:boldItalic r:id="rId24"/>
     </p:embeddedFont>
   </p:embeddedFontLst>
   <p:defaultTextStyle>
@@ -6418,10 +6419,10 @@
       </p:sp>
       <p:pic>
         <p:nvPicPr>
-          <p:cNvPr id="4" name="Imagen 3">
+          <p:cNvPr id="7" name="Imagen 6">
             <a:extLst>
               <a:ext uri="{FF2B5EF4-FFF2-40B4-BE49-F238E27FC236}">
-                <a16:creationId xmlns:a16="http://schemas.microsoft.com/office/drawing/2014/main" id="{4C7865B1-EDA7-B53C-94EC-BA69BFCC028C}"/>
+                <a16:creationId xmlns:a16="http://schemas.microsoft.com/office/drawing/2014/main" id="{E7F2602B-9D9D-C977-286C-7B00CD168828}"/>
               </a:ext>
             </a:extLst>
           </p:cNvPr>
@@ -6438,8 +6439,8 @@
         </p:blipFill>
         <p:spPr>
           <a:xfrm>
-            <a:off x="-6725" y="1349560"/>
-            <a:ext cx="9144000" cy="2587256"/>
+            <a:off x="0" y="1352930"/>
+            <a:ext cx="9144000" cy="2580515"/>
           </a:xfrm>
           <a:prstGeom prst="rect">
             <a:avLst/>
@@ -6522,10 +6523,10 @@
       </p:sp>
       <p:pic>
         <p:nvPicPr>
-          <p:cNvPr id="3" name="Imagen 2">
+          <p:cNvPr id="7" name="Imagen 6">
             <a:extLst>
               <a:ext uri="{FF2B5EF4-FFF2-40B4-BE49-F238E27FC236}">
-                <a16:creationId xmlns:a16="http://schemas.microsoft.com/office/drawing/2014/main" id="{F983B9F0-F1B6-9CD7-9AFB-C42894DAB813}"/>
+                <a16:creationId xmlns:a16="http://schemas.microsoft.com/office/drawing/2014/main" id="{4EEF2743-5B6C-76DA-39E7-2745BEB7424E}"/>
               </a:ext>
             </a:extLst>
           </p:cNvPr>
@@ -6542,8 +6543,8 @@
         </p:blipFill>
         <p:spPr>
           <a:xfrm>
-            <a:off x="-6725" y="757561"/>
-            <a:ext cx="9144000" cy="3771254"/>
+            <a:off x="-6725" y="558285"/>
+            <a:ext cx="9144000" cy="4169806"/>
           </a:xfrm>
           <a:prstGeom prst="rect">
             <a:avLst/>
@@ -6620,10 +6621,10 @@
       </p:sp>
       <p:pic>
         <p:nvPicPr>
-          <p:cNvPr id="5" name="Imagen 4">
+          <p:cNvPr id="4" name="Imagen 3">
             <a:extLst>
               <a:ext uri="{FF2B5EF4-FFF2-40B4-BE49-F238E27FC236}">
-                <a16:creationId xmlns:a16="http://schemas.microsoft.com/office/drawing/2014/main" id="{E9D560D6-DCF8-3CB9-4213-D04B7E313696}"/>
+                <a16:creationId xmlns:a16="http://schemas.microsoft.com/office/drawing/2014/main" id="{6ED1922D-A910-8BB7-BF9F-81FB3CD7289A}"/>
               </a:ext>
             </a:extLst>
           </p:cNvPr>
@@ -6640,8 +6641,8 @@
         </p:blipFill>
         <p:spPr>
           <a:xfrm>
-            <a:off x="0" y="1189753"/>
-            <a:ext cx="9144000" cy="2763994"/>
+            <a:off x="-6725" y="887662"/>
+            <a:ext cx="9144000" cy="3511052"/>
           </a:xfrm>
           <a:prstGeom prst="rect">
             <a:avLst/>
@@ -6718,10 +6719,10 @@
       </p:sp>
       <p:pic>
         <p:nvPicPr>
-          <p:cNvPr id="3" name="Imagen 2">
+          <p:cNvPr id="4" name="Imagen 3">
             <a:extLst>
               <a:ext uri="{FF2B5EF4-FFF2-40B4-BE49-F238E27FC236}">
-                <a16:creationId xmlns:a16="http://schemas.microsoft.com/office/drawing/2014/main" id="{EC52C117-3ADB-AF29-329B-DFD9739D8CE5}"/>
+                <a16:creationId xmlns:a16="http://schemas.microsoft.com/office/drawing/2014/main" id="{C2ADD2CB-E67F-3598-C872-FB7C47B18915}"/>
               </a:ext>
             </a:extLst>
           </p:cNvPr>
@@ -6738,8 +6739,8 @@
         </p:blipFill>
         <p:spPr>
           <a:xfrm>
-            <a:off x="0" y="704012"/>
-            <a:ext cx="9144000" cy="3878352"/>
+            <a:off x="0" y="432326"/>
+            <a:ext cx="9144000" cy="4421723"/>
           </a:xfrm>
           <a:prstGeom prst="rect">
             <a:avLst/>
@@ -6760,6 +6761,104 @@
 </file>
 
 <file path=ppt/slides/slide14.xml><?xml version="1.0" encoding="utf-8"?>
+<p:sld xmlns:a="http://schemas.openxmlformats.org/drawingml/2006/main" xmlns:r="http://schemas.openxmlformats.org/officeDocument/2006/relationships" xmlns:p="http://schemas.openxmlformats.org/presentationml/2006/main">
+  <p:cSld>
+    <p:spTree>
+      <p:nvGrpSpPr>
+        <p:cNvPr id="1" name=""/>
+        <p:cNvGrpSpPr/>
+        <p:nvPr/>
+      </p:nvGrpSpPr>
+      <p:grpSpPr>
+        <a:xfrm>
+          <a:off x="0" y="0"/>
+          <a:ext cx="0" cy="0"/>
+          <a:chOff x="0" y="0"/>
+          <a:chExt cx="0" cy="0"/>
+        </a:xfrm>
+      </p:grpSpPr>
+      <p:sp>
+        <p:nvSpPr>
+          <p:cNvPr id="5" name="CuadroTexto 4">
+            <a:extLst>
+              <a:ext uri="{FF2B5EF4-FFF2-40B4-BE49-F238E27FC236}">
+                <a16:creationId xmlns:a16="http://schemas.microsoft.com/office/drawing/2014/main" id="{A7C59986-F48B-C2F8-8717-714125E0D234}"/>
+              </a:ext>
+            </a:extLst>
+          </p:cNvPr>
+          <p:cNvSpPr txBox="1"/>
+          <p:nvPr/>
+        </p:nvSpPr>
+        <p:spPr>
+          <a:xfrm>
+            <a:off x="1926166" y="88135"/>
+            <a:ext cx="5291667" cy="307777"/>
+          </a:xfrm>
+          <a:prstGeom prst="rect">
+            <a:avLst/>
+          </a:prstGeom>
+          <a:noFill/>
+        </p:spPr>
+        <p:txBody>
+          <a:bodyPr wrap="square" rtlCol="0">
+            <a:spAutoFit/>
+          </a:bodyPr>
+          <a:lstStyle/>
+          <a:p>
+            <a:pPr algn="ctr"/>
+            <a:r>
+              <a:rPr lang="es-MX" b="1" dirty="0">
+                <a:latin typeface="Montserrat" pitchFamily="2" charset="0"/>
+              </a:rPr>
+              <a:t>Opinión emitida por radioescuchas</a:t>
+            </a:r>
+          </a:p>
+        </p:txBody>
+      </p:sp>
+      <p:pic>
+        <p:nvPicPr>
+          <p:cNvPr id="7" name="Imagen 6">
+            <a:extLst>
+              <a:ext uri="{FF2B5EF4-FFF2-40B4-BE49-F238E27FC236}">
+                <a16:creationId xmlns:a16="http://schemas.microsoft.com/office/drawing/2014/main" id="{0CA1E62F-3804-D02A-4F67-3360EB84F213}"/>
+              </a:ext>
+            </a:extLst>
+          </p:cNvPr>
+          <p:cNvPicPr>
+            <a:picLocks noChangeAspect="1"/>
+          </p:cNvPicPr>
+          <p:nvPr/>
+        </p:nvPicPr>
+        <p:blipFill>
+          <a:blip r:embed="rId2"/>
+          <a:stretch>
+            <a:fillRect/>
+          </a:stretch>
+        </p:blipFill>
+        <p:spPr>
+          <a:xfrm>
+            <a:off x="0" y="728451"/>
+            <a:ext cx="9144000" cy="3829474"/>
+          </a:xfrm>
+          <a:prstGeom prst="rect">
+            <a:avLst/>
+          </a:prstGeom>
+        </p:spPr>
+      </p:pic>
+    </p:spTree>
+    <p:extLst>
+      <p:ext uri="{BB962C8B-B14F-4D97-AF65-F5344CB8AC3E}">
+        <p14:creationId xmlns:p14="http://schemas.microsoft.com/office/powerpoint/2010/main" val="2614820817"/>
+      </p:ext>
+    </p:extLst>
+  </p:cSld>
+  <p:clrMapOvr>
+    <a:masterClrMapping/>
+  </p:clrMapOvr>
+</p:sld>
+</file>
+
+<file path=ppt/slides/slide15.xml><?xml version="1.0" encoding="utf-8"?>
 <p:sld xmlns:a="http://schemas.openxmlformats.org/drawingml/2006/main" xmlns:r="http://schemas.openxmlformats.org/officeDocument/2006/relationships" xmlns:p="http://schemas.openxmlformats.org/presentationml/2006/main">
   <p:cSld>
     <p:spTree>
@@ -7664,10 +7763,10 @@
       </p:sp>
       <p:pic>
         <p:nvPicPr>
-          <p:cNvPr id="5" name="Imagen 4">
+          <p:cNvPr id="7" name="Imagen 6">
             <a:extLst>
               <a:ext uri="{FF2B5EF4-FFF2-40B4-BE49-F238E27FC236}">
-                <a16:creationId xmlns:a16="http://schemas.microsoft.com/office/drawing/2014/main" id="{B75F16DE-9971-556E-07CB-0ED439CEC07D}"/>
+                <a16:creationId xmlns:a16="http://schemas.microsoft.com/office/drawing/2014/main" id="{190C8162-0464-4DE9-95AC-09B86A4C1811}"/>
               </a:ext>
             </a:extLst>
           </p:cNvPr>
@@ -7684,8 +7783,8 @@
         </p:blipFill>
         <p:spPr>
           <a:xfrm>
-            <a:off x="0" y="991320"/>
-            <a:ext cx="9144000" cy="3506459"/>
+            <a:off x="0" y="539865"/>
+            <a:ext cx="9144000" cy="4206646"/>
           </a:xfrm>
           <a:prstGeom prst="rect">
             <a:avLst/>
